--- a/assets/pptx/catalog-165.pptx
+++ b/assets/pptx/catalog-165.pptx
@@ -3267,7 +3267,7 @@
                 <a:ea typeface="Ebrima"/>
                 <a:cs typeface="Ebrima"/>
               </a:rPr>
-              <a:t>መዳኔ ነው ለእኔ (2x)</a:t>
+              <a:t>መዳኔ ነው ለእኔ 2x</a:t>
             </a:r>
           </a:p>
         </p:txBody>
@@ -3388,7 +3388,7 @@
                 <a:ea typeface="Ebrima"/>
                 <a:cs typeface="Ebrima"/>
               </a:rPr>
-              <a:t>አንዱና ትልቁ መዳኔ ነው ለእኔ (2x)</a:t>
+              <a:t>አንዱና ትልቁ መዳኔ ነው ለእኔ 2x</a:t>
             </a:r>
           </a:p>
         </p:txBody>
@@ -3473,7 +3473,7 @@
                 <a:ea typeface="Ebrima"/>
                 <a:cs typeface="Ebrima"/>
               </a:rPr>
-              <a:t>መዳኔ ነው ለእኔ (2x)</a:t>
+              <a:t>መዳኔ ነው ለእኔ 2x</a:t>
             </a:r>
           </a:p>
         </p:txBody>
@@ -3594,7 +3594,7 @@
                 <a:ea typeface="Ebrima"/>
                 <a:cs typeface="Ebrima"/>
               </a:rPr>
-              <a:t>አንዴ ወዶኛል ላይጠላኝ ምሎ (2x)</a:t>
+              <a:t>አንዴ ወዶኛል ላይጠላኝ ምሎ 2x</a:t>
             </a:r>
           </a:p>
         </p:txBody>
@@ -3715,7 +3715,7 @@
                 <a:ea typeface="Ebrima"/>
                 <a:cs typeface="Ebrima"/>
               </a:rPr>
-              <a:t>አንዱና ትልቁ መዳኔ ነው ለእኔ (2x)</a:t>
+              <a:t>አንዱና ትልቁ መዳኔ ነው ለእኔ 2x</a:t>
             </a:r>
           </a:p>
         </p:txBody>
@@ -3800,7 +3800,7 @@
                 <a:ea typeface="Ebrima"/>
                 <a:cs typeface="Ebrima"/>
               </a:rPr>
-              <a:t>መዳኔ ነው ለእኔ (2x)</a:t>
+              <a:t>መዳኔ ነው ለእኔ 2x</a:t>
             </a:r>
           </a:p>
         </p:txBody>
@@ -4127,7 +4127,7 @@
                 <a:ea typeface="Ebrima"/>
                 <a:cs typeface="Ebrima"/>
               </a:rPr>
-              <a:t>አንዱና ትልቁ መዳኔ ነው ለእኔ (2x)</a:t>
+              <a:t>አንዱና ትልቁ መዳኔ ነው ለእኔ 2x</a:t>
             </a:r>
           </a:p>
         </p:txBody>
